--- a/topic09-polymorphism-abstraction/unit-09a-lectures/talk-1-polymorphism/b-exploring-polymorphism.pptx
+++ b/topic09-polymorphism-abstraction/unit-09a-lectures/talk-1-polymorphism/b-exploring-polymorphism.pptx
@@ -246,7 +246,7 @@
           <a:p>
             <a:fld id="{56BC3C30-7F3D-4B20-9974-47C57B22CA6E}" type="datetimeFigureOut">
               <a:rPr lang="en-IE" smtClean="0"/>
-              <a:t>21/03/2025</a:t>
+              <a:t>16/03/2026</a:t>
             </a:fld>
             <a:endParaRPr lang="en-IE"/>
           </a:p>
@@ -1766,7 +1766,7 @@
             <a:fld id="{1D8BD707-D9CF-40AE-B4C6-C98DA3205C09}" type="datetimeFigureOut">
               <a:rPr lang="en-US" smtClean="0"/>
               <a:pPr/>
-              <a:t>3/21/25</a:t>
+              <a:t>3/16/2026</a:t>
             </a:fld>
             <a:endParaRPr lang="en-US"/>
           </a:p>
@@ -1931,7 +1931,7 @@
             <a:fld id="{1D8BD707-D9CF-40AE-B4C6-C98DA3205C09}" type="datetimeFigureOut">
               <a:rPr lang="en-US" smtClean="0"/>
               <a:pPr/>
-              <a:t>3/21/25</a:t>
+              <a:t>3/16/2026</a:t>
             </a:fld>
             <a:endParaRPr lang="en-US"/>
           </a:p>
@@ -2106,7 +2106,7 @@
             <a:fld id="{1D8BD707-D9CF-40AE-B4C6-C98DA3205C09}" type="datetimeFigureOut">
               <a:rPr lang="en-US" smtClean="0"/>
               <a:pPr/>
-              <a:t>3/21/25</a:t>
+              <a:t>3/16/2026</a:t>
             </a:fld>
             <a:endParaRPr lang="en-US"/>
           </a:p>
@@ -2482,7 +2482,7 @@
             <a:fld id="{1D8BD707-D9CF-40AE-B4C6-C98DA3205C09}" type="datetimeFigureOut">
               <a:rPr lang="en-US" smtClean="0"/>
               <a:pPr/>
-              <a:t>3/21/25</a:t>
+              <a:t>3/16/2026</a:t>
             </a:fld>
             <a:endParaRPr lang="en-US"/>
           </a:p>
@@ -2762,7 +2762,7 @@
             <a:fld id="{1D8BD707-D9CF-40AE-B4C6-C98DA3205C09}" type="datetimeFigureOut">
               <a:rPr lang="en-US" smtClean="0"/>
               <a:pPr/>
-              <a:t>3/21/25</a:t>
+              <a:t>3/16/2026</a:t>
             </a:fld>
             <a:endParaRPr lang="en-US"/>
           </a:p>
@@ -3055,7 +3055,7 @@
             <a:fld id="{1D8BD707-D9CF-40AE-B4C6-C98DA3205C09}" type="datetimeFigureOut">
               <a:rPr lang="en-US" smtClean="0"/>
               <a:pPr/>
-              <a:t>3/21/25</a:t>
+              <a:t>3/16/2026</a:t>
             </a:fld>
             <a:endParaRPr lang="en-US"/>
           </a:p>
@@ -3513,7 +3513,7 @@
             <a:fld id="{1D8BD707-D9CF-40AE-B4C6-C98DA3205C09}" type="datetimeFigureOut">
               <a:rPr lang="en-US" smtClean="0"/>
               <a:pPr/>
-              <a:t>3/21/25</a:t>
+              <a:t>3/16/2026</a:t>
             </a:fld>
             <a:endParaRPr lang="en-US"/>
           </a:p>
@@ -3673,7 +3673,7 @@
             <a:fld id="{1D8BD707-D9CF-40AE-B4C6-C98DA3205C09}" type="datetimeFigureOut">
               <a:rPr lang="en-US" smtClean="0"/>
               <a:pPr/>
-              <a:t>3/21/25</a:t>
+              <a:t>3/16/2026</a:t>
             </a:fld>
             <a:endParaRPr lang="en-US"/>
           </a:p>
@@ -3800,7 +3800,7 @@
             <a:fld id="{1D8BD707-D9CF-40AE-B4C6-C98DA3205C09}" type="datetimeFigureOut">
               <a:rPr lang="en-US" smtClean="0"/>
               <a:pPr/>
-              <a:t>3/21/25</a:t>
+              <a:t>3/16/2026</a:t>
             </a:fld>
             <a:endParaRPr lang="en-US"/>
           </a:p>
@@ -4072,7 +4072,7 @@
             <a:fld id="{1D8BD707-D9CF-40AE-B4C6-C98DA3205C09}" type="datetimeFigureOut">
               <a:rPr lang="en-US" smtClean="0"/>
               <a:pPr/>
-              <a:t>3/21/25</a:t>
+              <a:t>3/16/2026</a:t>
             </a:fld>
             <a:endParaRPr lang="en-US"/>
           </a:p>
@@ -4321,7 +4321,7 @@
             <a:fld id="{1D8BD707-D9CF-40AE-B4C6-C98DA3205C09}" type="datetimeFigureOut">
               <a:rPr lang="en-US" smtClean="0"/>
               <a:pPr/>
-              <a:t>3/21/25</a:t>
+              <a:t>3/16/2026</a:t>
             </a:fld>
             <a:endParaRPr lang="en-US"/>
           </a:p>
@@ -4529,7 +4529,7 @@
             <a:fld id="{1D8BD707-D9CF-40AE-B4C6-C98DA3205C09}" type="datetimeFigureOut">
               <a:rPr lang="en-US" smtClean="0"/>
               <a:pPr/>
-              <a:t>3/21/25</a:t>
+              <a:t>3/16/2026</a:t>
             </a:fld>
             <a:endParaRPr lang="en-US"/>
           </a:p>
@@ -19871,6 +19871,14 @@
 <file path=ppt/slides/slide36.xml><?xml version="1.0" encoding="utf-8"?>
 <p:sld xmlns:a="http://schemas.openxmlformats.org/drawingml/2006/main" xmlns:r="http://schemas.openxmlformats.org/officeDocument/2006/relationships" xmlns:p="http://schemas.openxmlformats.org/presentationml/2006/main">
   <p:cSld>
+    <p:bg>
+      <p:bgPr>
+        <a:solidFill>
+          <a:schemeClr val="bg1"/>
+        </a:solidFill>
+        <a:effectLst/>
+      </p:bgPr>
+    </p:bg>
     <p:spTree>
       <p:nvGrpSpPr>
         <p:cNvPr id="1" name=""/>
@@ -19885,47 +19893,72 @@
           <a:chExt cx="0" cy="0"/>
         </a:xfrm>
       </p:grpSpPr>
-      <p:pic>
-        <p:nvPicPr>
-          <p:cNvPr id="8194" name="Picture 2" descr="C:\Users\Siobhan\AppData\Local\Microsoft\Windows\Temporary Internet Files\Content.IE5\D6SFLNVW\questions-2[1].jpg"/>
-          <p:cNvPicPr>
-            <a:picLocks noChangeAspect="1" noChangeArrowheads="1"/>
-          </p:cNvPicPr>
-          <p:nvPr/>
-        </p:nvPicPr>
-        <p:blipFill>
-          <a:blip r:embed="rId3">
+      <p:sp>
+        <p:nvSpPr>
+          <p:cNvPr id="8" name="Down Arrow 7">
             <a:extLst>
-              <a:ext uri="{28A0092B-C50C-407E-A947-70E740481C1C}">
-                <a14:useLocalDpi xmlns:a14="http://schemas.microsoft.com/office/drawing/2010/main" val="0"/>
+              <a:ext uri="{FF2B5EF4-FFF2-40B4-BE49-F238E27FC236}">
+                <a16:creationId xmlns:a16="http://schemas.microsoft.com/office/drawing/2014/main" id="{D4771268-CB57-404A-9271-370EB28F6090}"/>
+              </a:ext>
+              <a:ext uri="{C183D7F6-B498-43B3-948B-1728B52AA6E4}">
+                <adec:decorative xmlns:adec="http://schemas.microsoft.com/office/drawing/2017/decorative" val="1"/>
               </a:ext>
             </a:extLst>
-          </a:blip>
-          <a:srcRect/>
-          <a:stretch>
-            <a:fillRect/>
-          </a:stretch>
-        </p:blipFill>
-        <p:spPr bwMode="auto">
-          <a:xfrm>
-            <a:off x="5283200" y="1397000"/>
-            <a:ext cx="4394200" cy="4394200"/>
+          </p:cNvPr>
+          <p:cNvSpPr>
+            <a:spLocks noGrp="1" noRot="1" noChangeAspect="1" noMove="1" noResize="1" noEditPoints="1" noAdjustHandles="1" noChangeArrowheads="1" noChangeShapeType="1" noTextEdit="1"/>
+          </p:cNvSpPr>
+          <p:nvPr>
+            <p:extLst>
+              <p:ext uri="{386F3935-93C4-4BCD-93E2-E3B085C9AB24}">
+                <p16:designElem xmlns:p16="http://schemas.microsoft.com/office/powerpoint/2015/main" val="1"/>
+              </p:ext>
+            </p:extLst>
+          </p:nvPr>
+        </p:nvSpPr>
+        <p:spPr>
+          <a:xfrm rot="16200000">
+            <a:off x="800100" y="1491343"/>
+            <a:ext cx="3333749" cy="3499103"/>
           </a:xfrm>
-          <a:prstGeom prst="rect">
-            <a:avLst/>
+          <a:prstGeom prst="downArrow">
+            <a:avLst>
+              <a:gd name="adj1" fmla="val 100000"/>
+              <a:gd name="adj2" fmla="val 15788"/>
+            </a:avLst>
           </a:prstGeom>
-          <a:noFill/>
-          <a:extLst>
-            <a:ext uri="{909E8E84-426E-40DD-AFC4-6F175D3DCCD1}">
-              <a14:hiddenFill xmlns:a14="http://schemas.microsoft.com/office/drawing/2010/main">
-                <a:solidFill>
-                  <a:srgbClr val="FFFFFF"/>
-                </a:solidFill>
-              </a14:hiddenFill>
-            </a:ext>
-          </a:extLst>
+          <a:solidFill>
+            <a:srgbClr val="404040"/>
+          </a:solidFill>
+          <a:ln w="53975">
+            <a:noFill/>
+          </a:ln>
         </p:spPr>
-      </p:pic>
+        <p:style>
+          <a:lnRef idx="2">
+            <a:schemeClr val="accent1">
+              <a:shade val="50000"/>
+            </a:schemeClr>
+          </a:lnRef>
+          <a:fillRef idx="1">
+            <a:schemeClr val="accent1"/>
+          </a:fillRef>
+          <a:effectRef idx="0">
+            <a:schemeClr val="accent1"/>
+          </a:effectRef>
+          <a:fontRef idx="minor">
+            <a:schemeClr val="lt1"/>
+          </a:fontRef>
+        </p:style>
+        <p:txBody>
+          <a:bodyPr rtlCol="0" anchor="ctr"/>
+          <a:lstStyle/>
+          <a:p>
+            <a:pPr algn="ctr"/>
+            <a:endParaRPr lang="en-US"/>
+          </a:p>
+        </p:txBody>
+      </p:sp>
       <p:sp>
         <p:nvSpPr>
           <p:cNvPr id="2" name="Rectangle 1"/>
@@ -19934,8 +19967,8 @@
         </p:nvSpPr>
         <p:spPr>
           <a:xfrm>
-            <a:off x="2305398" y="2766874"/>
-            <a:ext cx="3485803" cy="1754326"/>
+            <a:off x="1028700" y="1967266"/>
+            <a:ext cx="2628900" cy="2547257"/>
           </a:xfrm>
           <a:prstGeom prst="rect">
             <a:avLst/>
@@ -19943,8 +19976,8 @@
           <a:noFill/>
         </p:spPr>
         <p:txBody>
-          <a:bodyPr wrap="square" lIns="91440" tIns="45720" rIns="91440" bIns="45720">
-            <a:spAutoFit/>
+          <a:bodyPr vert="horz" lIns="91440" tIns="45720" rIns="91440" bIns="45720" rtlCol="0" anchor="ctr">
+            <a:normAutofit/>
             <a:scene3d>
               <a:camera prst="orthographicFront"/>
               <a:lightRig rig="flat" dir="tl">
@@ -19962,35 +19995,23 @@
           </a:bodyPr>
           <a:lstStyle/>
           <a:p>
-            <a:pPr algn="ctr"/>
-            <a:r>
-              <a:rPr lang="en-US" sz="5400" b="1" dirty="0">
+            <a:pPr algn="ctr">
+              <a:lnSpc>
+                <a:spcPct val="90000"/>
+              </a:lnSpc>
+              <a:spcBef>
+                <a:spcPct val="0"/>
+              </a:spcBef>
+              <a:spcAft>
+                <a:spcPts val="600"/>
+              </a:spcAft>
+            </a:pPr>
+            <a:r>
+              <a:rPr lang="en-US" sz="3600" b="1" kern="1200" dirty="0">
                 <a:ln w="11430"/>
-                <a:gradFill>
-                  <a:gsLst>
-                    <a:gs pos="0">
-                      <a:schemeClr val="accent2">
-                        <a:tint val="70000"/>
-                        <a:satMod val="245000"/>
-                      </a:schemeClr>
-                    </a:gs>
-                    <a:gs pos="75000">
-                      <a:schemeClr val="accent2">
-                        <a:tint val="90000"/>
-                        <a:shade val="60000"/>
-                        <a:satMod val="240000"/>
-                      </a:schemeClr>
-                    </a:gs>
-                    <a:gs pos="100000">
-                      <a:schemeClr val="accent2">
-                        <a:tint val="100000"/>
-                        <a:shade val="50000"/>
-                        <a:satMod val="240000"/>
-                      </a:schemeClr>
-                    </a:gs>
-                  </a:gsLst>
-                  <a:lin ang="5400000"/>
-                </a:gradFill>
+                <a:solidFill>
+                  <a:srgbClr val="FFFFFF"/>
+                </a:solidFill>
                 <a:effectLst>
                   <a:outerShdw blurRad="50800" dist="39000" dir="5460000" algn="tl">
                     <a:srgbClr val="000000">
@@ -19998,12 +20019,52 @@
                     </a:srgbClr>
                   </a:outerShdw>
                 </a:effectLst>
+                <a:latin typeface="+mj-lt"/>
+                <a:ea typeface="+mj-ea"/>
+                <a:cs typeface="+mj-cs"/>
               </a:rPr>
               <a:t>Any Questions?</a:t>
             </a:r>
           </a:p>
         </p:txBody>
       </p:sp>
+      <p:pic>
+        <p:nvPicPr>
+          <p:cNvPr id="3" name="Picture 2" descr="A green question mark in a circle&#10;&#10;AI-generated content may be incorrect.">
+            <a:extLst>
+              <a:ext uri="{FF2B5EF4-FFF2-40B4-BE49-F238E27FC236}">
+                <a16:creationId xmlns:a16="http://schemas.microsoft.com/office/drawing/2014/main" id="{41B1677B-B259-9710-8AB0-D650FE42A93E}"/>
+              </a:ext>
+            </a:extLst>
+          </p:cNvPr>
+          <p:cNvPicPr>
+            <a:picLocks noChangeAspect="1"/>
+          </p:cNvPicPr>
+          <p:nvPr/>
+        </p:nvPicPr>
+        <p:blipFill>
+          <a:blip r:embed="rId3">
+            <a:extLst>
+              <a:ext uri="{28A0092B-C50C-407E-A947-70E740481C1C}">
+                <a14:useLocalDpi xmlns:a14="http://schemas.microsoft.com/office/drawing/2010/main" val="0"/>
+              </a:ext>
+            </a:extLst>
+          </a:blip>
+          <a:stretch>
+            <a:fillRect/>
+          </a:stretch>
+        </p:blipFill>
+        <p:spPr>
+          <a:xfrm>
+            <a:off x="5383296" y="643466"/>
+            <a:ext cx="5568739" cy="5568739"/>
+          </a:xfrm>
+          <a:prstGeom prst="rect">
+            <a:avLst/>
+          </a:prstGeom>
+          <a:noFill/>
+        </p:spPr>
+      </p:pic>
     </p:spTree>
     <p:custDataLst>
       <p:tags r:id="rId1"/>

--- a/topic09-polymorphism-abstraction/unit-09a-lectures/talk-1-polymorphism/b-exploring-polymorphism.pptx
+++ b/topic09-polymorphism-abstraction/unit-09a-lectures/talk-1-polymorphism/b-exploring-polymorphism.pptx
@@ -246,7 +246,7 @@
           <a:p>
             <a:fld id="{56BC3C30-7F3D-4B20-9974-47C57B22CA6E}" type="datetimeFigureOut">
               <a:rPr lang="en-IE" smtClean="0"/>
-              <a:t>16/03/2026</a:t>
+              <a:t>24/03/2026</a:t>
             </a:fld>
             <a:endParaRPr lang="en-IE"/>
           </a:p>
@@ -1766,7 +1766,7 @@
             <a:fld id="{1D8BD707-D9CF-40AE-B4C6-C98DA3205C09}" type="datetimeFigureOut">
               <a:rPr lang="en-US" smtClean="0"/>
               <a:pPr/>
-              <a:t>3/16/2026</a:t>
+              <a:t>3/24/26</a:t>
             </a:fld>
             <a:endParaRPr lang="en-US"/>
           </a:p>
@@ -1931,7 +1931,7 @@
             <a:fld id="{1D8BD707-D9CF-40AE-B4C6-C98DA3205C09}" type="datetimeFigureOut">
               <a:rPr lang="en-US" smtClean="0"/>
               <a:pPr/>
-              <a:t>3/16/2026</a:t>
+              <a:t>3/24/26</a:t>
             </a:fld>
             <a:endParaRPr lang="en-US"/>
           </a:p>
@@ -2106,7 +2106,7 @@
             <a:fld id="{1D8BD707-D9CF-40AE-B4C6-C98DA3205C09}" type="datetimeFigureOut">
               <a:rPr lang="en-US" smtClean="0"/>
               <a:pPr/>
-              <a:t>3/16/2026</a:t>
+              <a:t>3/24/26</a:t>
             </a:fld>
             <a:endParaRPr lang="en-US"/>
           </a:p>
@@ -2482,7 +2482,7 @@
             <a:fld id="{1D8BD707-D9CF-40AE-B4C6-C98DA3205C09}" type="datetimeFigureOut">
               <a:rPr lang="en-US" smtClean="0"/>
               <a:pPr/>
-              <a:t>3/16/2026</a:t>
+              <a:t>3/24/26</a:t>
             </a:fld>
             <a:endParaRPr lang="en-US"/>
           </a:p>
@@ -2762,7 +2762,7 @@
             <a:fld id="{1D8BD707-D9CF-40AE-B4C6-C98DA3205C09}" type="datetimeFigureOut">
               <a:rPr lang="en-US" smtClean="0"/>
               <a:pPr/>
-              <a:t>3/16/2026</a:t>
+              <a:t>3/24/26</a:t>
             </a:fld>
             <a:endParaRPr lang="en-US"/>
           </a:p>
@@ -3055,7 +3055,7 @@
             <a:fld id="{1D8BD707-D9CF-40AE-B4C6-C98DA3205C09}" type="datetimeFigureOut">
               <a:rPr lang="en-US" smtClean="0"/>
               <a:pPr/>
-              <a:t>3/16/2026</a:t>
+              <a:t>3/24/26</a:t>
             </a:fld>
             <a:endParaRPr lang="en-US"/>
           </a:p>
@@ -3513,7 +3513,7 @@
             <a:fld id="{1D8BD707-D9CF-40AE-B4C6-C98DA3205C09}" type="datetimeFigureOut">
               <a:rPr lang="en-US" smtClean="0"/>
               <a:pPr/>
-              <a:t>3/16/2026</a:t>
+              <a:t>3/24/26</a:t>
             </a:fld>
             <a:endParaRPr lang="en-US"/>
           </a:p>
@@ -3673,7 +3673,7 @@
             <a:fld id="{1D8BD707-D9CF-40AE-B4C6-C98DA3205C09}" type="datetimeFigureOut">
               <a:rPr lang="en-US" smtClean="0"/>
               <a:pPr/>
-              <a:t>3/16/2026</a:t>
+              <a:t>3/24/26</a:t>
             </a:fld>
             <a:endParaRPr lang="en-US"/>
           </a:p>
@@ -3800,7 +3800,7 @@
             <a:fld id="{1D8BD707-D9CF-40AE-B4C6-C98DA3205C09}" type="datetimeFigureOut">
               <a:rPr lang="en-US" smtClean="0"/>
               <a:pPr/>
-              <a:t>3/16/2026</a:t>
+              <a:t>3/24/26</a:t>
             </a:fld>
             <a:endParaRPr lang="en-US"/>
           </a:p>
@@ -4072,7 +4072,7 @@
             <a:fld id="{1D8BD707-D9CF-40AE-B4C6-C98DA3205C09}" type="datetimeFigureOut">
               <a:rPr lang="en-US" smtClean="0"/>
               <a:pPr/>
-              <a:t>3/16/2026</a:t>
+              <a:t>3/24/26</a:t>
             </a:fld>
             <a:endParaRPr lang="en-US"/>
           </a:p>
@@ -4321,7 +4321,7 @@
             <a:fld id="{1D8BD707-D9CF-40AE-B4C6-C98DA3205C09}" type="datetimeFigureOut">
               <a:rPr lang="en-US" smtClean="0"/>
               <a:pPr/>
-              <a:t>3/16/2026</a:t>
+              <a:t>3/24/26</a:t>
             </a:fld>
             <a:endParaRPr lang="en-US"/>
           </a:p>
@@ -4529,7 +4529,7 @@
             <a:fld id="{1D8BD707-D9CF-40AE-B4C6-C98DA3205C09}" type="datetimeFigureOut">
               <a:rPr lang="en-US" smtClean="0"/>
               <a:pPr/>
-              <a:t>3/16/2026</a:t>
+              <a:t>3/24/26</a:t>
             </a:fld>
             <a:endParaRPr lang="en-US"/>
           </a:p>
@@ -6998,6 +6998,79 @@
                                   </p:childTnLst>
                                 </p:cTn>
                               </p:par>
+                              <p:par>
+                                <p:cTn id="33" presetID="2" presetClass="entr" presetSubtype="4" fill="hold" nodeType="withEffect">
+                                  <p:stCondLst>
+                                    <p:cond delay="0"/>
+                                  </p:stCondLst>
+                                  <p:childTnLst>
+                                    <p:set>
+                                      <p:cBhvr>
+                                        <p:cTn id="34" dur="1" fill="hold">
+                                          <p:stCondLst>
+                                            <p:cond delay="0"/>
+                                          </p:stCondLst>
+                                        </p:cTn>
+                                        <p:tgtEl>
+                                          <p:spTgt spid="4"/>
+                                        </p:tgtEl>
+                                        <p:attrNameLst>
+                                          <p:attrName>style.visibility</p:attrName>
+                                        </p:attrNameLst>
+                                      </p:cBhvr>
+                                      <p:to>
+                                        <p:strVal val="visible"/>
+                                      </p:to>
+                                    </p:set>
+                                    <p:anim calcmode="lin" valueType="num">
+                                      <p:cBhvr additive="base">
+                                        <p:cTn id="35" dur="500" fill="hold"/>
+                                        <p:tgtEl>
+                                          <p:spTgt spid="4"/>
+                                        </p:tgtEl>
+                                        <p:attrNameLst>
+                                          <p:attrName>ppt_x</p:attrName>
+                                        </p:attrNameLst>
+                                      </p:cBhvr>
+                                      <p:tavLst>
+                                        <p:tav tm="0">
+                                          <p:val>
+                                            <p:strVal val="#ppt_x"/>
+                                          </p:val>
+                                        </p:tav>
+                                        <p:tav tm="100000">
+                                          <p:val>
+                                            <p:strVal val="#ppt_x"/>
+                                          </p:val>
+                                        </p:tav>
+                                      </p:tavLst>
+                                    </p:anim>
+                                    <p:anim calcmode="lin" valueType="num">
+                                      <p:cBhvr additive="base">
+                                        <p:cTn id="36" dur="500" fill="hold"/>
+                                        <p:tgtEl>
+                                          <p:spTgt spid="4"/>
+                                        </p:tgtEl>
+                                        <p:attrNameLst>
+                                          <p:attrName>ppt_y</p:attrName>
+                                        </p:attrNameLst>
+                                      </p:cBhvr>
+                                      <p:tavLst>
+                                        <p:tav tm="0">
+                                          <p:val>
+                                            <p:strVal val="1+#ppt_h/2"/>
+                                          </p:val>
+                                        </p:tav>
+                                        <p:tav tm="100000">
+                                          <p:val>
+                                            <p:strVal val="#ppt_y"/>
+                                          </p:val>
+                                        </p:tav>
+                                      </p:tavLst>
+                                    </p:anim>
+                                  </p:childTnLst>
+                                </p:cTn>
+                              </p:par>
                             </p:childTnLst>
                           </p:cTn>
                         </p:par>
@@ -7005,26 +7078,26 @@
                     </p:cTn>
                   </p:par>
                   <p:par>
-                    <p:cTn id="33" fill="hold">
+                    <p:cTn id="37" fill="hold">
                       <p:stCondLst>
                         <p:cond delay="indefinite"/>
                       </p:stCondLst>
                       <p:childTnLst>
                         <p:par>
-                          <p:cTn id="34" fill="hold">
+                          <p:cTn id="38" fill="hold">
                             <p:stCondLst>
                               <p:cond delay="0"/>
                             </p:stCondLst>
                             <p:childTnLst>
                               <p:par>
-                                <p:cTn id="35" presetID="2" presetClass="entr" presetSubtype="4" fill="hold" grpId="0" nodeType="clickEffect">
+                                <p:cTn id="39" presetID="2" presetClass="entr" presetSubtype="4" fill="hold" grpId="0" nodeType="clickEffect">
                                   <p:stCondLst>
                                     <p:cond delay="0"/>
                                   </p:stCondLst>
                                   <p:childTnLst>
                                     <p:set>
                                       <p:cBhvr>
-                                        <p:cTn id="36" dur="1" fill="hold">
+                                        <p:cTn id="40" dur="1" fill="hold">
                                           <p:stCondLst>
                                             <p:cond delay="0"/>
                                           </p:stCondLst>
@@ -7042,7 +7115,7 @@
                                     </p:set>
                                     <p:anim calcmode="lin" valueType="num">
                                       <p:cBhvr additive="base">
-                                        <p:cTn id="37" dur="500" fill="hold"/>
+                                        <p:cTn id="41" dur="500" fill="hold"/>
                                         <p:tgtEl>
                                           <p:spTgt spid="5"/>
                                         </p:tgtEl>
@@ -7065,9 +7138,82 @@
                                     </p:anim>
                                     <p:anim calcmode="lin" valueType="num">
                                       <p:cBhvr additive="base">
-                                        <p:cTn id="38" dur="500" fill="hold"/>
+                                        <p:cTn id="42" dur="500" fill="hold"/>
                                         <p:tgtEl>
                                           <p:spTgt spid="5"/>
+                                        </p:tgtEl>
+                                        <p:attrNameLst>
+                                          <p:attrName>ppt_y</p:attrName>
+                                        </p:attrNameLst>
+                                      </p:cBhvr>
+                                      <p:tavLst>
+                                        <p:tav tm="0">
+                                          <p:val>
+                                            <p:strVal val="1+#ppt_h/2"/>
+                                          </p:val>
+                                        </p:tav>
+                                        <p:tav tm="100000">
+                                          <p:val>
+                                            <p:strVal val="#ppt_y"/>
+                                          </p:val>
+                                        </p:tav>
+                                      </p:tavLst>
+                                    </p:anim>
+                                  </p:childTnLst>
+                                </p:cTn>
+                              </p:par>
+                              <p:par>
+                                <p:cTn id="43" presetID="2" presetClass="entr" presetSubtype="4" fill="hold" nodeType="withEffect">
+                                  <p:stCondLst>
+                                    <p:cond delay="0"/>
+                                  </p:stCondLst>
+                                  <p:childTnLst>
+                                    <p:set>
+                                      <p:cBhvr>
+                                        <p:cTn id="44" dur="1" fill="hold">
+                                          <p:stCondLst>
+                                            <p:cond delay="0"/>
+                                          </p:stCondLst>
+                                        </p:cTn>
+                                        <p:tgtEl>
+                                          <p:spTgt spid="11"/>
+                                        </p:tgtEl>
+                                        <p:attrNameLst>
+                                          <p:attrName>style.visibility</p:attrName>
+                                        </p:attrNameLst>
+                                      </p:cBhvr>
+                                      <p:to>
+                                        <p:strVal val="visible"/>
+                                      </p:to>
+                                    </p:set>
+                                    <p:anim calcmode="lin" valueType="num">
+                                      <p:cBhvr additive="base">
+                                        <p:cTn id="45" dur="500" fill="hold"/>
+                                        <p:tgtEl>
+                                          <p:spTgt spid="11"/>
+                                        </p:tgtEl>
+                                        <p:attrNameLst>
+                                          <p:attrName>ppt_x</p:attrName>
+                                        </p:attrNameLst>
+                                      </p:cBhvr>
+                                      <p:tavLst>
+                                        <p:tav tm="0">
+                                          <p:val>
+                                            <p:strVal val="#ppt_x"/>
+                                          </p:val>
+                                        </p:tav>
+                                        <p:tav tm="100000">
+                                          <p:val>
+                                            <p:strVal val="#ppt_x"/>
+                                          </p:val>
+                                        </p:tav>
+                                      </p:tavLst>
+                                    </p:anim>
+                                    <p:anim calcmode="lin" valueType="num">
+                                      <p:cBhvr additive="base">
+                                        <p:cTn id="46" dur="500" fill="hold"/>
+                                        <p:tgtEl>
+                                          <p:spTgt spid="11"/>
                                         </p:tgtEl>
                                         <p:attrNameLst>
                                           <p:attrName>ppt_y</p:attrName>
@@ -7892,6 +8038,79 @@
                                   </p:childTnLst>
                                 </p:cTn>
                               </p:par>
+                              <p:par>
+                                <p:cTn id="21" presetID="2" presetClass="entr" presetSubtype="4" fill="hold" nodeType="withEffect">
+                                  <p:stCondLst>
+                                    <p:cond delay="0"/>
+                                  </p:stCondLst>
+                                  <p:childTnLst>
+                                    <p:set>
+                                      <p:cBhvr>
+                                        <p:cTn id="22" dur="1" fill="hold">
+                                          <p:stCondLst>
+                                            <p:cond delay="0"/>
+                                          </p:stCondLst>
+                                        </p:cTn>
+                                        <p:tgtEl>
+                                          <p:spTgt spid="4"/>
+                                        </p:tgtEl>
+                                        <p:attrNameLst>
+                                          <p:attrName>style.visibility</p:attrName>
+                                        </p:attrNameLst>
+                                      </p:cBhvr>
+                                      <p:to>
+                                        <p:strVal val="visible"/>
+                                      </p:to>
+                                    </p:set>
+                                    <p:anim calcmode="lin" valueType="num">
+                                      <p:cBhvr additive="base">
+                                        <p:cTn id="23" dur="500" fill="hold"/>
+                                        <p:tgtEl>
+                                          <p:spTgt spid="4"/>
+                                        </p:tgtEl>
+                                        <p:attrNameLst>
+                                          <p:attrName>ppt_x</p:attrName>
+                                        </p:attrNameLst>
+                                      </p:cBhvr>
+                                      <p:tavLst>
+                                        <p:tav tm="0">
+                                          <p:val>
+                                            <p:strVal val="#ppt_x"/>
+                                          </p:val>
+                                        </p:tav>
+                                        <p:tav tm="100000">
+                                          <p:val>
+                                            <p:strVal val="#ppt_x"/>
+                                          </p:val>
+                                        </p:tav>
+                                      </p:tavLst>
+                                    </p:anim>
+                                    <p:anim calcmode="lin" valueType="num">
+                                      <p:cBhvr additive="base">
+                                        <p:cTn id="24" dur="500" fill="hold"/>
+                                        <p:tgtEl>
+                                          <p:spTgt spid="4"/>
+                                        </p:tgtEl>
+                                        <p:attrNameLst>
+                                          <p:attrName>ppt_y</p:attrName>
+                                        </p:attrNameLst>
+                                      </p:cBhvr>
+                                      <p:tavLst>
+                                        <p:tav tm="0">
+                                          <p:val>
+                                            <p:strVal val="1+#ppt_h/2"/>
+                                          </p:val>
+                                        </p:tav>
+                                        <p:tav tm="100000">
+                                          <p:val>
+                                            <p:strVal val="#ppt_y"/>
+                                          </p:val>
+                                        </p:tav>
+                                      </p:tavLst>
+                                    </p:anim>
+                                  </p:childTnLst>
+                                </p:cTn>
+                              </p:par>
                             </p:childTnLst>
                           </p:cTn>
                         </p:par>
@@ -7899,26 +8118,26 @@
                     </p:cTn>
                   </p:par>
                   <p:par>
-                    <p:cTn id="21" fill="hold">
+                    <p:cTn id="25" fill="hold">
                       <p:stCondLst>
                         <p:cond delay="indefinite"/>
                       </p:stCondLst>
                       <p:childTnLst>
                         <p:par>
-                          <p:cTn id="22" fill="hold">
+                          <p:cTn id="26" fill="hold">
                             <p:stCondLst>
                               <p:cond delay="0"/>
                             </p:stCondLst>
                             <p:childTnLst>
                               <p:par>
-                                <p:cTn id="23" presetID="2" presetClass="entr" presetSubtype="4" fill="hold" nodeType="clickEffect">
+                                <p:cTn id="27" presetID="2" presetClass="entr" presetSubtype="4" fill="hold" nodeType="clickEffect">
                                   <p:stCondLst>
                                     <p:cond delay="0"/>
                                   </p:stCondLst>
                                   <p:childTnLst>
                                     <p:set>
                                       <p:cBhvr>
-                                        <p:cTn id="24" dur="1" fill="hold">
+                                        <p:cTn id="28" dur="1" fill="hold">
                                           <p:stCondLst>
                                             <p:cond delay="0"/>
                                           </p:stCondLst>
@@ -7940,7 +8159,7 @@
                                     </p:set>
                                     <p:anim calcmode="lin" valueType="num">
                                       <p:cBhvr additive="base">
-                                        <p:cTn id="25" dur="500" fill="hold"/>
+                                        <p:cTn id="29" dur="500" fill="hold"/>
                                         <p:tgtEl>
                                           <p:spTgt spid="5">
                                             <p:txEl>
@@ -7967,7 +8186,244 @@
                                     </p:anim>
                                     <p:anim calcmode="lin" valueType="num">
                                       <p:cBhvr additive="base">
-                                        <p:cTn id="26" dur="500" fill="hold"/>
+                                        <p:cTn id="30" dur="500" fill="hold"/>
+                                        <p:tgtEl>
+                                          <p:spTgt spid="5">
+                                            <p:txEl>
+                                              <p:pRg st="0" end="0"/>
+                                            </p:txEl>
+                                          </p:spTgt>
+                                        </p:tgtEl>
+                                        <p:attrNameLst>
+                                          <p:attrName>ppt_y</p:attrName>
+                                        </p:attrNameLst>
+                                      </p:cBhvr>
+                                      <p:tavLst>
+                                        <p:tav tm="0">
+                                          <p:val>
+                                            <p:strVal val="1+#ppt_h/2"/>
+                                          </p:val>
+                                        </p:tav>
+                                        <p:tav tm="100000">
+                                          <p:val>
+                                            <p:strVal val="#ppt_y"/>
+                                          </p:val>
+                                        </p:tav>
+                                      </p:tavLst>
+                                    </p:anim>
+                                  </p:childTnLst>
+                                </p:cTn>
+                              </p:par>
+                              <p:par>
+                                <p:cTn id="31" presetID="2" presetClass="entr" presetSubtype="4" fill="hold" nodeType="withEffect">
+                                  <p:stCondLst>
+                                    <p:cond delay="0"/>
+                                  </p:stCondLst>
+                                  <p:childTnLst>
+                                    <p:set>
+                                      <p:cBhvr>
+                                        <p:cTn id="32" dur="1" fill="hold">
+                                          <p:stCondLst>
+                                            <p:cond delay="0"/>
+                                          </p:stCondLst>
+                                        </p:cTn>
+                                        <p:tgtEl>
+                                          <p:spTgt spid="11"/>
+                                        </p:tgtEl>
+                                        <p:attrNameLst>
+                                          <p:attrName>style.visibility</p:attrName>
+                                        </p:attrNameLst>
+                                      </p:cBhvr>
+                                      <p:to>
+                                        <p:strVal val="visible"/>
+                                      </p:to>
+                                    </p:set>
+                                    <p:anim calcmode="lin" valueType="num">
+                                      <p:cBhvr additive="base">
+                                        <p:cTn id="33" dur="500" fill="hold"/>
+                                        <p:tgtEl>
+                                          <p:spTgt spid="11"/>
+                                        </p:tgtEl>
+                                        <p:attrNameLst>
+                                          <p:attrName>ppt_x</p:attrName>
+                                        </p:attrNameLst>
+                                      </p:cBhvr>
+                                      <p:tavLst>
+                                        <p:tav tm="0">
+                                          <p:val>
+                                            <p:strVal val="#ppt_x"/>
+                                          </p:val>
+                                        </p:tav>
+                                        <p:tav tm="100000">
+                                          <p:val>
+                                            <p:strVal val="#ppt_x"/>
+                                          </p:val>
+                                        </p:tav>
+                                      </p:tavLst>
+                                    </p:anim>
+                                    <p:anim calcmode="lin" valueType="num">
+                                      <p:cBhvr additive="base">
+                                        <p:cTn id="34" dur="500" fill="hold"/>
+                                        <p:tgtEl>
+                                          <p:spTgt spid="11"/>
+                                        </p:tgtEl>
+                                        <p:attrNameLst>
+                                          <p:attrName>ppt_y</p:attrName>
+                                        </p:attrNameLst>
+                                      </p:cBhvr>
+                                      <p:tavLst>
+                                        <p:tav tm="0">
+                                          <p:val>
+                                            <p:strVal val="1+#ppt_h/2"/>
+                                          </p:val>
+                                        </p:tav>
+                                        <p:tav tm="100000">
+                                          <p:val>
+                                            <p:strVal val="#ppt_y"/>
+                                          </p:val>
+                                        </p:tav>
+                                      </p:tavLst>
+                                    </p:anim>
+                                  </p:childTnLst>
+                                </p:cTn>
+                              </p:par>
+                              <p:par>
+                                <p:cTn id="35" presetID="2" presetClass="entr" presetSubtype="4" fill="hold" grpId="0" nodeType="withEffect">
+                                  <p:stCondLst>
+                                    <p:cond delay="0"/>
+                                  </p:stCondLst>
+                                  <p:childTnLst>
+                                    <p:set>
+                                      <p:cBhvr>
+                                        <p:cTn id="36" dur="1" fill="hold">
+                                          <p:stCondLst>
+                                            <p:cond delay="0"/>
+                                          </p:stCondLst>
+                                        </p:cTn>
+                                        <p:tgtEl>
+                                          <p:spTgt spid="5">
+                                            <p:bg/>
+                                          </p:spTgt>
+                                        </p:tgtEl>
+                                        <p:attrNameLst>
+                                          <p:attrName>style.visibility</p:attrName>
+                                        </p:attrNameLst>
+                                      </p:cBhvr>
+                                      <p:to>
+                                        <p:strVal val="visible"/>
+                                      </p:to>
+                                    </p:set>
+                                    <p:anim calcmode="lin" valueType="num">
+                                      <p:cBhvr additive="base">
+                                        <p:cTn id="37" dur="500" fill="hold"/>
+                                        <p:tgtEl>
+                                          <p:spTgt spid="5">
+                                            <p:bg/>
+                                          </p:spTgt>
+                                        </p:tgtEl>
+                                        <p:attrNameLst>
+                                          <p:attrName>ppt_x</p:attrName>
+                                        </p:attrNameLst>
+                                      </p:cBhvr>
+                                      <p:tavLst>
+                                        <p:tav tm="0">
+                                          <p:val>
+                                            <p:strVal val="#ppt_x"/>
+                                          </p:val>
+                                        </p:tav>
+                                        <p:tav tm="100000">
+                                          <p:val>
+                                            <p:strVal val="#ppt_x"/>
+                                          </p:val>
+                                        </p:tav>
+                                      </p:tavLst>
+                                    </p:anim>
+                                    <p:anim calcmode="lin" valueType="num">
+                                      <p:cBhvr additive="base">
+                                        <p:cTn id="38" dur="500" fill="hold"/>
+                                        <p:tgtEl>
+                                          <p:spTgt spid="5">
+                                            <p:bg/>
+                                          </p:spTgt>
+                                        </p:tgtEl>
+                                        <p:attrNameLst>
+                                          <p:attrName>ppt_y</p:attrName>
+                                        </p:attrNameLst>
+                                      </p:cBhvr>
+                                      <p:tavLst>
+                                        <p:tav tm="0">
+                                          <p:val>
+                                            <p:strVal val="1+#ppt_h/2"/>
+                                          </p:val>
+                                        </p:tav>
+                                        <p:tav tm="100000">
+                                          <p:val>
+                                            <p:strVal val="#ppt_y"/>
+                                          </p:val>
+                                        </p:tav>
+                                      </p:tavLst>
+                                    </p:anim>
+                                  </p:childTnLst>
+                                </p:cTn>
+                              </p:par>
+                              <p:par>
+                                <p:cTn id="39" presetID="2" presetClass="entr" presetSubtype="4" fill="hold" grpId="0" nodeType="withEffect">
+                                  <p:stCondLst>
+                                    <p:cond delay="0"/>
+                                  </p:stCondLst>
+                                  <p:childTnLst>
+                                    <p:set>
+                                      <p:cBhvr>
+                                        <p:cTn id="40" dur="1" fill="hold">
+                                          <p:stCondLst>
+                                            <p:cond delay="0"/>
+                                          </p:stCondLst>
+                                        </p:cTn>
+                                        <p:tgtEl>
+                                          <p:spTgt spid="5">
+                                            <p:txEl>
+                                              <p:pRg st="0" end="0"/>
+                                            </p:txEl>
+                                          </p:spTgt>
+                                        </p:tgtEl>
+                                        <p:attrNameLst>
+                                          <p:attrName>style.visibility</p:attrName>
+                                        </p:attrNameLst>
+                                      </p:cBhvr>
+                                      <p:to>
+                                        <p:strVal val="visible"/>
+                                      </p:to>
+                                    </p:set>
+                                    <p:anim calcmode="lin" valueType="num">
+                                      <p:cBhvr additive="base">
+                                        <p:cTn id="41" dur="500" fill="hold"/>
+                                        <p:tgtEl>
+                                          <p:spTgt spid="5">
+                                            <p:txEl>
+                                              <p:pRg st="0" end="0"/>
+                                            </p:txEl>
+                                          </p:spTgt>
+                                        </p:tgtEl>
+                                        <p:attrNameLst>
+                                          <p:attrName>ppt_x</p:attrName>
+                                        </p:attrNameLst>
+                                      </p:cBhvr>
+                                      <p:tavLst>
+                                        <p:tav tm="0">
+                                          <p:val>
+                                            <p:strVal val="#ppt_x"/>
+                                          </p:val>
+                                        </p:tav>
+                                        <p:tav tm="100000">
+                                          <p:val>
+                                            <p:strVal val="#ppt_x"/>
+                                          </p:val>
+                                        </p:tav>
+                                      </p:tavLst>
+                                    </p:anim>
+                                    <p:anim calcmode="lin" valueType="num">
+                                      <p:cBhvr additive="base">
+                                        <p:cTn id="42" dur="500" fill="hold"/>
                                         <p:tgtEl>
                                           <p:spTgt spid="5">
                                             <p:txEl>
@@ -8026,6 +8482,7 @@
       <p:bldP spid="11270" grpId="0"/>
       <p:bldP spid="11271" grpId="0" animBg="1"/>
       <p:bldP spid="2" grpId="0" animBg="1"/>
+      <p:bldP spid="5" grpId="0" build="allAtOnce" animBg="1"/>
     </p:bldLst>
   </p:timing>
 </p:sld>
@@ -10107,7 +10564,7 @@
         </p:nvSpPr>
         <p:spPr bwMode="auto">
           <a:xfrm>
-            <a:off x="7177086" y="4648200"/>
+            <a:off x="7136606" y="4572000"/>
             <a:ext cx="2819400" cy="1600200"/>
           </a:xfrm>
           <a:prstGeom prst="ellipse">
@@ -10441,7 +10898,7 @@
                             </p:stCondLst>
                             <p:childTnLst>
                               <p:par>
-                                <p:cTn id="19" presetID="2" presetClass="entr" presetSubtype="4" fill="hold" nodeType="clickEffect">
+                                <p:cTn id="19" presetID="2" presetClass="entr" presetSubtype="4" fill="hold" grpId="0" nodeType="clickEffect">
                                   <p:stCondLst>
                                     <p:cond delay="0"/>
                                   </p:stCondLst>
@@ -10455,9 +10912,7 @@
                                         </p:cTn>
                                         <p:tgtEl>
                                           <p:spTgt spid="13320">
-                                            <p:txEl>
-                                              <p:pRg st="0" end="0"/>
-                                            </p:txEl>
+                                            <p:bg/>
                                           </p:spTgt>
                                         </p:tgtEl>
                                         <p:attrNameLst>
@@ -10473,9 +10928,7 @@
                                         <p:cTn id="21" dur="500" fill="hold"/>
                                         <p:tgtEl>
                                           <p:spTgt spid="13320">
-                                            <p:txEl>
-                                              <p:pRg st="0" end="0"/>
-                                            </p:txEl>
+                                            <p:bg/>
                                           </p:spTgt>
                                         </p:tgtEl>
                                         <p:attrNameLst>
@@ -10498,6 +10951,174 @@
                                     <p:anim calcmode="lin" valueType="num">
                                       <p:cBhvr additive="base">
                                         <p:cTn id="22" dur="500" fill="hold"/>
+                                        <p:tgtEl>
+                                          <p:spTgt spid="13320">
+                                            <p:bg/>
+                                          </p:spTgt>
+                                        </p:tgtEl>
+                                        <p:attrNameLst>
+                                          <p:attrName>ppt_y</p:attrName>
+                                        </p:attrNameLst>
+                                      </p:cBhvr>
+                                      <p:tavLst>
+                                        <p:tav tm="0">
+                                          <p:val>
+                                            <p:strVal val="1+#ppt_h/2"/>
+                                          </p:val>
+                                        </p:tav>
+                                        <p:tav tm="100000">
+                                          <p:val>
+                                            <p:strVal val="#ppt_y"/>
+                                          </p:val>
+                                        </p:tav>
+                                      </p:tavLst>
+                                    </p:anim>
+                                  </p:childTnLst>
+                                </p:cTn>
+                              </p:par>
+                              <p:par>
+                                <p:cTn id="23" presetID="2" presetClass="entr" presetSubtype="4" fill="hold" grpId="0" nodeType="withEffect">
+                                  <p:stCondLst>
+                                    <p:cond delay="0"/>
+                                  </p:stCondLst>
+                                  <p:childTnLst>
+                                    <p:set>
+                                      <p:cBhvr>
+                                        <p:cTn id="24" dur="1" fill="hold">
+                                          <p:stCondLst>
+                                            <p:cond delay="0"/>
+                                          </p:stCondLst>
+                                        </p:cTn>
+                                        <p:tgtEl>
+                                          <p:spTgt spid="13320">
+                                            <p:txEl>
+                                              <p:pRg st="0" end="0"/>
+                                            </p:txEl>
+                                          </p:spTgt>
+                                        </p:tgtEl>
+                                        <p:attrNameLst>
+                                          <p:attrName>style.visibility</p:attrName>
+                                        </p:attrNameLst>
+                                      </p:cBhvr>
+                                      <p:to>
+                                        <p:strVal val="visible"/>
+                                      </p:to>
+                                    </p:set>
+                                    <p:anim calcmode="lin" valueType="num">
+                                      <p:cBhvr additive="base">
+                                        <p:cTn id="25" dur="500" fill="hold"/>
+                                        <p:tgtEl>
+                                          <p:spTgt spid="13320">
+                                            <p:txEl>
+                                              <p:pRg st="0" end="0"/>
+                                            </p:txEl>
+                                          </p:spTgt>
+                                        </p:tgtEl>
+                                        <p:attrNameLst>
+                                          <p:attrName>ppt_x</p:attrName>
+                                        </p:attrNameLst>
+                                      </p:cBhvr>
+                                      <p:tavLst>
+                                        <p:tav tm="0">
+                                          <p:val>
+                                            <p:strVal val="#ppt_x"/>
+                                          </p:val>
+                                        </p:tav>
+                                        <p:tav tm="100000">
+                                          <p:val>
+                                            <p:strVal val="#ppt_x"/>
+                                          </p:val>
+                                        </p:tav>
+                                      </p:tavLst>
+                                    </p:anim>
+                                    <p:anim calcmode="lin" valueType="num">
+                                      <p:cBhvr additive="base">
+                                        <p:cTn id="26" dur="500" fill="hold"/>
+                                        <p:tgtEl>
+                                          <p:spTgt spid="13320">
+                                            <p:txEl>
+                                              <p:pRg st="0" end="0"/>
+                                            </p:txEl>
+                                          </p:spTgt>
+                                        </p:tgtEl>
+                                        <p:attrNameLst>
+                                          <p:attrName>ppt_y</p:attrName>
+                                        </p:attrNameLst>
+                                      </p:cBhvr>
+                                      <p:tavLst>
+                                        <p:tav tm="0">
+                                          <p:val>
+                                            <p:strVal val="1+#ppt_h/2"/>
+                                          </p:val>
+                                        </p:tav>
+                                        <p:tav tm="100000">
+                                          <p:val>
+                                            <p:strVal val="#ppt_y"/>
+                                          </p:val>
+                                        </p:tav>
+                                      </p:tavLst>
+                                    </p:anim>
+                                  </p:childTnLst>
+                                </p:cTn>
+                              </p:par>
+                              <p:par>
+                                <p:cTn id="27" presetID="2" presetClass="entr" presetSubtype="4" fill="hold" nodeType="withEffect">
+                                  <p:stCondLst>
+                                    <p:cond delay="0"/>
+                                  </p:stCondLst>
+                                  <p:childTnLst>
+                                    <p:set>
+                                      <p:cBhvr>
+                                        <p:cTn id="28" dur="1" fill="hold">
+                                          <p:stCondLst>
+                                            <p:cond delay="0"/>
+                                          </p:stCondLst>
+                                        </p:cTn>
+                                        <p:tgtEl>
+                                          <p:spTgt spid="13320">
+                                            <p:txEl>
+                                              <p:pRg st="0" end="0"/>
+                                            </p:txEl>
+                                          </p:spTgt>
+                                        </p:tgtEl>
+                                        <p:attrNameLst>
+                                          <p:attrName>style.visibility</p:attrName>
+                                        </p:attrNameLst>
+                                      </p:cBhvr>
+                                      <p:to>
+                                        <p:strVal val="visible"/>
+                                      </p:to>
+                                    </p:set>
+                                    <p:anim calcmode="lin" valueType="num">
+                                      <p:cBhvr additive="base">
+                                        <p:cTn id="29" dur="500" fill="hold"/>
+                                        <p:tgtEl>
+                                          <p:spTgt spid="13320">
+                                            <p:txEl>
+                                              <p:pRg st="0" end="0"/>
+                                            </p:txEl>
+                                          </p:spTgt>
+                                        </p:tgtEl>
+                                        <p:attrNameLst>
+                                          <p:attrName>ppt_x</p:attrName>
+                                        </p:attrNameLst>
+                                      </p:cBhvr>
+                                      <p:tavLst>
+                                        <p:tav tm="0">
+                                          <p:val>
+                                            <p:strVal val="#ppt_x"/>
+                                          </p:val>
+                                        </p:tav>
+                                        <p:tav tm="100000">
+                                          <p:val>
+                                            <p:strVal val="#ppt_x"/>
+                                          </p:val>
+                                        </p:tav>
+                                      </p:tavLst>
+                                    </p:anim>
+                                    <p:anim calcmode="lin" valueType="num">
+                                      <p:cBhvr additive="base">
+                                        <p:cTn id="30" dur="500" fill="hold"/>
                                         <p:tgtEl>
                                           <p:spTgt spid="13320">
                                             <p:txEl>
@@ -10556,6 +11177,7 @@
       <p:bldP spid="13317" grpId="0" animBg="1"/>
       <p:bldP spid="13318" grpId="0" animBg="1"/>
       <p:bldP spid="13319" grpId="0" animBg="1"/>
+      <p:bldP spid="13320" grpId="0" build="allAtOnce" animBg="1"/>
     </p:bldLst>
   </p:timing>
 </p:sld>
@@ -13015,7 +13637,7 @@
                                         <p:tgtEl>
                                           <p:spTgt spid="18435">
                                             <p:txEl>
-                                              <p:pRg st="2" end="2"/>
+                                              <p:pRg st="3" end="3"/>
                                             </p:txEl>
                                           </p:spTgt>
                                         </p:tgtEl>
@@ -13033,7 +13655,7 @@
                                         <p:tgtEl>
                                           <p:spTgt spid="18435">
                                             <p:txEl>
-                                              <p:pRg st="2" end="2"/>
+                                              <p:pRg st="3" end="3"/>
                                             </p:txEl>
                                           </p:spTgt>
                                         </p:tgtEl>
@@ -13060,7 +13682,7 @@
                                         <p:tgtEl>
                                           <p:spTgt spid="18435">
                                             <p:txEl>
-                                              <p:pRg st="2" end="2"/>
+                                              <p:pRg st="3" end="3"/>
                                             </p:txEl>
                                           </p:spTgt>
                                         </p:tgtEl>
@@ -13118,7 +13740,7 @@
                                         <p:tgtEl>
                                           <p:spTgt spid="18435">
                                             <p:txEl>
-                                              <p:pRg st="3" end="3"/>
+                                              <p:pRg st="4" end="4"/>
                                             </p:txEl>
                                           </p:spTgt>
                                         </p:tgtEl>
@@ -13136,7 +13758,7 @@
                                         <p:tgtEl>
                                           <p:spTgt spid="18435">
                                             <p:txEl>
-                                              <p:pRg st="3" end="3"/>
+                                              <p:pRg st="4" end="4"/>
                                             </p:txEl>
                                           </p:spTgt>
                                         </p:tgtEl>
@@ -13163,7 +13785,7 @@
                                         <p:tgtEl>
                                           <p:spTgt spid="18435">
                                             <p:txEl>
-                                              <p:pRg st="3" end="3"/>
+                                              <p:pRg st="4" end="4"/>
                                             </p:txEl>
                                           </p:spTgt>
                                         </p:tgtEl>
@@ -13221,7 +13843,7 @@
                                         <p:tgtEl>
                                           <p:spTgt spid="18435">
                                             <p:txEl>
-                                              <p:pRg st="4" end="4"/>
+                                              <p:pRg st="5" end="5"/>
                                             </p:txEl>
                                           </p:spTgt>
                                         </p:tgtEl>
@@ -13239,7 +13861,7 @@
                                         <p:tgtEl>
                                           <p:spTgt spid="18435">
                                             <p:txEl>
-                                              <p:pRg st="4" end="4"/>
+                                              <p:pRg st="5" end="5"/>
                                             </p:txEl>
                                           </p:spTgt>
                                         </p:tgtEl>
@@ -13266,7 +13888,7 @@
                                         <p:tgtEl>
                                           <p:spTgt spid="18435">
                                             <p:txEl>
-                                              <p:pRg st="4" end="4"/>
+                                              <p:pRg st="5" end="5"/>
                                             </p:txEl>
                                           </p:spTgt>
                                         </p:tgtEl>
@@ -13324,7 +13946,7 @@
                                         <p:tgtEl>
                                           <p:spTgt spid="18435">
                                             <p:txEl>
-                                              <p:pRg st="5" end="5"/>
+                                              <p:pRg st="6" end="6"/>
                                             </p:txEl>
                                           </p:spTgt>
                                         </p:tgtEl>
@@ -13342,7 +13964,7 @@
                                         <p:tgtEl>
                                           <p:spTgt spid="18435">
                                             <p:txEl>
-                                              <p:pRg st="5" end="5"/>
+                                              <p:pRg st="6" end="6"/>
                                             </p:txEl>
                                           </p:spTgt>
                                         </p:tgtEl>
@@ -13366,109 +13988,6 @@
                                     <p:anim calcmode="lin" valueType="num">
                                       <p:cBhvr additive="base">
                                         <p:cTn id="44" dur="500" fill="hold"/>
-                                        <p:tgtEl>
-                                          <p:spTgt spid="18435">
-                                            <p:txEl>
-                                              <p:pRg st="5" end="5"/>
-                                            </p:txEl>
-                                          </p:spTgt>
-                                        </p:tgtEl>
-                                        <p:attrNameLst>
-                                          <p:attrName>ppt_y</p:attrName>
-                                        </p:attrNameLst>
-                                      </p:cBhvr>
-                                      <p:tavLst>
-                                        <p:tav tm="0">
-                                          <p:val>
-                                            <p:strVal val="1+#ppt_h/2"/>
-                                          </p:val>
-                                        </p:tav>
-                                        <p:tav tm="100000">
-                                          <p:val>
-                                            <p:strVal val="#ppt_y"/>
-                                          </p:val>
-                                        </p:tav>
-                                      </p:tavLst>
-                                    </p:anim>
-                                  </p:childTnLst>
-                                </p:cTn>
-                              </p:par>
-                            </p:childTnLst>
-                          </p:cTn>
-                        </p:par>
-                      </p:childTnLst>
-                    </p:cTn>
-                  </p:par>
-                  <p:par>
-                    <p:cTn id="45" fill="hold">
-                      <p:stCondLst>
-                        <p:cond delay="indefinite"/>
-                      </p:stCondLst>
-                      <p:childTnLst>
-                        <p:par>
-                          <p:cTn id="46" fill="hold">
-                            <p:stCondLst>
-                              <p:cond delay="0"/>
-                            </p:stCondLst>
-                            <p:childTnLst>
-                              <p:par>
-                                <p:cTn id="47" presetID="2" presetClass="entr" presetSubtype="4" fill="hold" nodeType="clickEffect">
-                                  <p:stCondLst>
-                                    <p:cond delay="0"/>
-                                  </p:stCondLst>
-                                  <p:childTnLst>
-                                    <p:set>
-                                      <p:cBhvr>
-                                        <p:cTn id="48" dur="1" fill="hold">
-                                          <p:stCondLst>
-                                            <p:cond delay="0"/>
-                                          </p:stCondLst>
-                                        </p:cTn>
-                                        <p:tgtEl>
-                                          <p:spTgt spid="18435">
-                                            <p:txEl>
-                                              <p:pRg st="6" end="6"/>
-                                            </p:txEl>
-                                          </p:spTgt>
-                                        </p:tgtEl>
-                                        <p:attrNameLst>
-                                          <p:attrName>style.visibility</p:attrName>
-                                        </p:attrNameLst>
-                                      </p:cBhvr>
-                                      <p:to>
-                                        <p:strVal val="visible"/>
-                                      </p:to>
-                                    </p:set>
-                                    <p:anim calcmode="lin" valueType="num">
-                                      <p:cBhvr additive="base">
-                                        <p:cTn id="49" dur="500" fill="hold"/>
-                                        <p:tgtEl>
-                                          <p:spTgt spid="18435">
-                                            <p:txEl>
-                                              <p:pRg st="6" end="6"/>
-                                            </p:txEl>
-                                          </p:spTgt>
-                                        </p:tgtEl>
-                                        <p:attrNameLst>
-                                          <p:attrName>ppt_x</p:attrName>
-                                        </p:attrNameLst>
-                                      </p:cBhvr>
-                                      <p:tavLst>
-                                        <p:tav tm="0">
-                                          <p:val>
-                                            <p:strVal val="#ppt_x"/>
-                                          </p:val>
-                                        </p:tav>
-                                        <p:tav tm="100000">
-                                          <p:val>
-                                            <p:strVal val="#ppt_x"/>
-                                          </p:val>
-                                        </p:tav>
-                                      </p:tavLst>
-                                    </p:anim>
-                                    <p:anim calcmode="lin" valueType="num">
-                                      <p:cBhvr additive="base">
-                                        <p:cTn id="50" dur="500" fill="hold"/>
                                         <p:tgtEl>
                                           <p:spTgt spid="18435">
                                             <p:txEl>
@@ -14924,7 +15443,7 @@
                                           </p:stCondLst>
                                         </p:cTn>
                                         <p:tgtEl>
-                                          <p:spTgt spid="2"/>
+                                          <p:spTgt spid="3"/>
                                         </p:tgtEl>
                                         <p:attrNameLst>
                                           <p:attrName>style.visibility</p:attrName>
@@ -14938,7 +15457,7 @@
                                       <p:cBhvr additive="base">
                                         <p:cTn id="7" dur="500" fill="hold"/>
                                         <p:tgtEl>
-                                          <p:spTgt spid="2"/>
+                                          <p:spTgt spid="3"/>
                                         </p:tgtEl>
                                         <p:attrNameLst>
                                           <p:attrName>ppt_x</p:attrName>
@@ -14961,7 +15480,7 @@
                                       <p:cBhvr additive="base">
                                         <p:cTn id="8" dur="500" fill="hold"/>
                                         <p:tgtEl>
-                                          <p:spTgt spid="2"/>
+                                          <p:spTgt spid="3"/>
                                         </p:tgtEl>
                                         <p:attrNameLst>
                                           <p:attrName>ppt_y</p:attrName>
@@ -14997,7 +15516,7 @@
                                           </p:stCondLst>
                                         </p:cTn>
                                         <p:tgtEl>
-                                          <p:spTgt spid="7"/>
+                                          <p:spTgt spid="4"/>
                                         </p:tgtEl>
                                         <p:attrNameLst>
                                           <p:attrName>style.visibility</p:attrName>
@@ -15011,7 +15530,7 @@
                                       <p:cBhvr additive="base">
                                         <p:cTn id="11" dur="500" fill="hold"/>
                                         <p:tgtEl>
-                                          <p:spTgt spid="7"/>
+                                          <p:spTgt spid="4"/>
                                         </p:tgtEl>
                                         <p:attrNameLst>
                                           <p:attrName>ppt_x</p:attrName>
@@ -15034,7 +15553,7 @@
                                       <p:cBhvr additive="base">
                                         <p:cTn id="12" dur="500" fill="hold"/>
                                         <p:tgtEl>
-                                          <p:spTgt spid="7"/>
+                                          <p:spTgt spid="4"/>
                                         </p:tgtEl>
                                         <p:attrNameLst>
                                           <p:attrName>ppt_y</p:attrName>
@@ -15088,7 +15607,7 @@
                                           </p:stCondLst>
                                         </p:cTn>
                                         <p:tgtEl>
-                                          <p:spTgt spid="3"/>
+                                          <p:spTgt spid="2"/>
                                         </p:tgtEl>
                                         <p:attrNameLst>
                                           <p:attrName>style.visibility</p:attrName>
@@ -15102,7 +15621,7 @@
                                       <p:cBhvr additive="base">
                                         <p:cTn id="17" dur="500" fill="hold"/>
                                         <p:tgtEl>
-                                          <p:spTgt spid="3"/>
+                                          <p:spTgt spid="2"/>
                                         </p:tgtEl>
                                         <p:attrNameLst>
                                           <p:attrName>ppt_x</p:attrName>
@@ -15125,7 +15644,7 @@
                                       <p:cBhvr additive="base">
                                         <p:cTn id="18" dur="500" fill="hold"/>
                                         <p:tgtEl>
-                                          <p:spTgt spid="3"/>
+                                          <p:spTgt spid="2"/>
                                         </p:tgtEl>
                                         <p:attrNameLst>
                                           <p:attrName>ppt_y</p:attrName>
@@ -15161,7 +15680,7 @@
                                           </p:stCondLst>
                                         </p:cTn>
                                         <p:tgtEl>
-                                          <p:spTgt spid="4"/>
+                                          <p:spTgt spid="7"/>
                                         </p:tgtEl>
                                         <p:attrNameLst>
                                           <p:attrName>style.visibility</p:attrName>
@@ -15175,7 +15694,7 @@
                                       <p:cBhvr additive="base">
                                         <p:cTn id="21" dur="500" fill="hold"/>
                                         <p:tgtEl>
-                                          <p:spTgt spid="4"/>
+                                          <p:spTgt spid="7"/>
                                         </p:tgtEl>
                                         <p:attrNameLst>
                                           <p:attrName>ppt_x</p:attrName>
@@ -15198,7 +15717,7 @@
                                       <p:cBhvr additive="base">
                                         <p:cTn id="22" dur="500" fill="hold"/>
                                         <p:tgtEl>
-                                          <p:spTgt spid="4"/>
+                                          <p:spTgt spid="7"/>
                                         </p:tgtEl>
                                         <p:attrNameLst>
                                           <p:attrName>ppt_y</p:attrName>
